--- a/dist/초3/수학/분수와소수/초3_수학_분수와소수_01_분수의뜻_학생용.pptx
+++ b/dist/초3/수학/분수와소수/초3_수학_분수와소수_01_분수의뜻_학생용.pptx
@@ -118,44 +118,44 @@
   <p:extLst>
     <p:ext uri="{521415D9-36F7-43E2-AB2F-B90AF26B5E84}">
       <p14:sectionLst xmlns:p14="http://schemas.microsoft.com/office/powerpoint/2010/main">
-        <p14:section name="도입" id="{6aeaa59a-8232-51e2-bf52-664d816aac25}">
+        <p14:section name="도입" id="{d6805a36-05f9-9868-ed20-8d2f45d86201}">
           <p14:sldIdLst>
             <p14:sldId id="256"/>
             <p14:sldId id="257"/>
           </p14:sldIdLst>
         </p14:section>
-        <p14:section name="개념" id="{a42cbadb-16e4-f656-2100-19a35dd0b583}">
+        <p14:section name="개념" id="{0390e82f-7f70-3f74-31db-fb67686507ad}">
           <p14:sldIdLst>
             <p14:sldId id="258"/>
             <p14:sldId id="260"/>
             <p14:sldId id="261"/>
           </p14:sldIdLst>
         </p14:section>
-        <p14:section name="연습" id="{6b41fd40-d719-165b-00a8-574e3e29f266}">
+        <p14:section name="연습" id="{c8cbb5b0-0643-b943-0168-297a6749e3fa}">
           <p14:sldIdLst>
             <p14:sldId id="259"/>
             <p14:sldId id="262"/>
             <p14:sldId id="263"/>
           </p14:sldIdLst>
         </p14:section>
-        <p14:section name="개념" id="{f90b004e-de79-2dfb-877d-9e97d8f4fd48}">
+        <p14:section name="개념" id="{94990a75-8858-7510-0973-0b413dc298ee}">
           <p14:sldIdLst/>
         </p14:section>
-        <p14:section name="연습" id="{2d69ebdc-d6af-0b7f-327c-b913c2b3d8a4}">
+        <p14:section name="연습" id="{921f2c1d-a7ce-24d1-3e5b-42dcc9f0549e}">
           <p14:sldIdLst/>
         </p14:section>
-        <p14:section name="확인" id="{75054487-bfc8-9c01-f85f-8ca304c476d1}">
+        <p14:section name="확인" id="{2f451a6d-46b3-7d1a-2d67-378dda19465d}">
           <p14:sldIdLst>
             <p14:sldId id="264"/>
             <p14:sldId id="265"/>
           </p14:sldIdLst>
         </p14:section>
-        <p14:section name="정리" id="{76212156-f80b-a94d-0d2d-6ef74ac5bb71}">
+        <p14:section name="정리" id="{cfd9da29-d869-f8be-9a4e-9fbe1c591fb9}">
           <p14:sldIdLst>
             <p14:sldId id="266"/>
           </p14:sldIdLst>
         </p14:section>
-        <p14:section name="보충" id="{dd2d992a-adb7-9786-31a9-d6042fb4a378}">
+        <p14:section name="보충" id="{9d3ac1ae-5338-a65c-9527-3898f4dad491}">
           <p14:sldIdLst>
             <p14:sldId id="267"/>
           </p14:sldIdLst>
